--- a/builder/assets/reference-pages/scqa-roadmap.pptx
+++ b/builder/assets/reference-pages/scqa-roadmap.pptx
@@ -1033,1127 +1033,7 @@
 </a:theme>
 </file>
 
-<file path=ppt/slides/slide1.xml><?xml version="1.0" encoding="utf-8"?>
-<p:sld xmlns:p="http://schemas.openxmlformats.org/presentationml/2006/main">
-  <p:cSld>
-    <p:bg>
-      <p:bgPr>
-        <a:solidFill xmlns:a="http://schemas.openxmlformats.org/drawingml/2006/main">
-          <a:srgbClr val="FFFFFF"/>
-        </a:solidFill>
-      </p:bgPr>
-    </p:bg>
-    <p:spTree>
-      <p:nvGrpSpPr>
-        <p:cNvPr id="1" name=""/>
-        <p:cNvGrpSpPr/>
-        <p:nvPr/>
-      </p:nvGrpSpPr>
-      <p:grpSpPr>
-        <a:xfrm xmlns:a="http://schemas.openxmlformats.org/drawingml/2006/main"/>
-      </p:grpSpPr>
-      <p:cxnSp>
-        <p:nvCxnSpPr>
-          <p:cNvPr id="21" name=""/>
-          <p:cNvCxnSpPr>
-            <a:stCxn xmlns:a="http://schemas.openxmlformats.org/drawingml/2006/main" id="5" idx="2"/>
-            <a:endCxn xmlns:a="http://schemas.openxmlformats.org/drawingml/2006/main" id="9" idx="0"/>
-          </p:cNvCxnSpPr>
-          <p:nvPr/>
-        </p:nvCxnSpPr>
-        <p:spPr>
-          <a:xfrm xmlns:a="http://schemas.openxmlformats.org/drawingml/2006/main" flipH="1">
-            <a:off x="3565525" y="2447925"/>
-            <a:ext cx="6795295" cy="409575"/>
-          </a:xfrm>
-          <a:prstGeom xmlns:a="http://schemas.openxmlformats.org/drawingml/2006/main" prst="bentConnector4">
-            <a:avLst>
-              <a:gd name="adj1" fmla="val 0"/>
-              <a:gd name="adj2" fmla="val 50000"/>
-            </a:avLst>
-          </a:prstGeom>
-          <a:ln xmlns:a="http://schemas.openxmlformats.org/drawingml/2006/main" w="14288">
-            <a:solidFill>
-              <a:srgbClr val="2F6FB2"/>
-            </a:solidFill>
-            <a:prstDash val="solid"/>
-            <a:tailEnd type="triangle" w="med" len="med"/>
-          </a:ln>
-        </p:spPr>
-      </p:cxnSp>
-      <p:cxnSp>
-        <p:nvCxnSpPr>
-          <p:cNvPr id="22" name=""/>
-          <p:cNvCxnSpPr>
-            <a:stCxn xmlns:a="http://schemas.openxmlformats.org/drawingml/2006/main" id="4" idx="3"/>
-            <a:endCxn xmlns:a="http://schemas.openxmlformats.org/drawingml/2006/main" id="5" idx="1"/>
-          </p:cNvCxnSpPr>
-          <p:nvPr/>
-        </p:nvCxnSpPr>
-        <p:spPr>
-          <a:xfrm xmlns:a="http://schemas.openxmlformats.org/drawingml/2006/main">
-            <a:off x="8834438" y="1819275"/>
-            <a:ext cx="209550" cy="0"/>
-          </a:xfrm>
-          <a:prstGeom xmlns:a="http://schemas.openxmlformats.org/drawingml/2006/main" prst="straightConnector1">
-            <a:avLst/>
-          </a:prstGeom>
-          <a:ln xmlns:a="http://schemas.openxmlformats.org/drawingml/2006/main" w="17145">
-            <a:solidFill>
-              <a:srgbClr val="2F6FB2"/>
-            </a:solidFill>
-            <a:prstDash val="solid"/>
-            <a:tailEnd type="triangle" w="med" len="med"/>
-          </a:ln>
-        </p:spPr>
-      </p:cxnSp>
-      <p:cxnSp>
-        <p:nvCxnSpPr>
-          <p:cNvPr id="23" name=""/>
-          <p:cNvCxnSpPr>
-            <a:stCxn xmlns:a="http://schemas.openxmlformats.org/drawingml/2006/main" id="3" idx="3"/>
-            <a:endCxn xmlns:a="http://schemas.openxmlformats.org/drawingml/2006/main" id="4" idx="1"/>
-          </p:cNvCxnSpPr>
-          <p:nvPr/>
-        </p:nvCxnSpPr>
-        <p:spPr>
-          <a:xfrm xmlns:a="http://schemas.openxmlformats.org/drawingml/2006/main">
-            <a:off x="5991226" y="1819275"/>
-            <a:ext cx="209549" cy="0"/>
-          </a:xfrm>
-          <a:prstGeom xmlns:a="http://schemas.openxmlformats.org/drawingml/2006/main" prst="straightConnector1">
-            <a:avLst/>
-          </a:prstGeom>
-          <a:ln xmlns:a="http://schemas.openxmlformats.org/drawingml/2006/main" w="17145">
-            <a:solidFill>
-              <a:srgbClr val="2F6FB2"/>
-            </a:solidFill>
-            <a:prstDash val="solid"/>
-            <a:tailEnd type="triangle" w="med" len="med"/>
-          </a:ln>
-        </p:spPr>
-      </p:cxnSp>
-      <p:cxnSp>
-        <p:nvCxnSpPr>
-          <p:cNvPr id="24" name=""/>
-          <p:cNvCxnSpPr>
-            <a:stCxn xmlns:a="http://schemas.openxmlformats.org/drawingml/2006/main" id="2" idx="3"/>
-            <a:endCxn xmlns:a="http://schemas.openxmlformats.org/drawingml/2006/main" id="3" idx="1"/>
-          </p:cNvCxnSpPr>
-          <p:nvPr/>
-        </p:nvCxnSpPr>
-        <p:spPr>
-          <a:xfrm xmlns:a="http://schemas.openxmlformats.org/drawingml/2006/main">
-            <a:off x="3148013" y="1819275"/>
-            <a:ext cx="209550" cy="0"/>
-          </a:xfrm>
-          <a:prstGeom xmlns:a="http://schemas.openxmlformats.org/drawingml/2006/main" prst="straightConnector1">
-            <a:avLst/>
-          </a:prstGeom>
-          <a:ln xmlns:a="http://schemas.openxmlformats.org/drawingml/2006/main" w="17145">
-            <a:solidFill>
-              <a:srgbClr val="2F6FB2"/>
-            </a:solidFill>
-            <a:prstDash val="solid"/>
-            <a:tailEnd type="triangle" w="med" len="med"/>
-          </a:ln>
-        </p:spPr>
-      </p:cxnSp>
-      <p:sp>
-        <p:nvSpPr>
-          <p:cNvPr id="25" name="page-title">
-            <a:extLst xmlns:a="http://schemas.openxmlformats.org/drawingml/2006/main">
-              <a:ext uri="{FF2B5EF4-FFF2-40B4-BE49-F238E27FC236}">
-                <a16:creationId xmlns:a16="http://schemas.microsoft.com/office/drawing/2014/main" id="{679AEFDC-29FA-47D2-A315-5B095E0D1B46}"/>
-              </a:ext>
-            </a:extLst>
-          </p:cNvPr>
-          <p:cNvSpPr>
-            <a:spLocks xmlns:a="http://schemas.openxmlformats.org/drawingml/2006/main" noGrp="1"/>
-          </p:cNvSpPr>
-          <p:nvPr/>
-        </p:nvSpPr>
-        <p:spPr>
-          <a:xfrm xmlns:a="http://schemas.openxmlformats.org/drawingml/2006/main">
-            <a:off x="514350" y="266700"/>
-            <a:ext cx="11163300" cy="495300"/>
-          </a:xfrm>
-          <a:prstGeom xmlns:a="http://schemas.openxmlformats.org/drawingml/2006/main" prst="rect">
-            <a:avLst/>
-          </a:prstGeom>
-          <a:noFill xmlns:a="http://schemas.openxmlformats.org/drawingml/2006/main"/>
-          <a:ln xmlns:a="http://schemas.openxmlformats.org/drawingml/2006/main" w="0">
-            <a:noFill/>
-            <a:prstDash val="solid"/>
-          </a:ln>
-        </p:spPr>
-        <p:txBody>
-          <a:bodyPr xmlns:a="http://schemas.openxmlformats.org/drawingml/2006/main" anchor="ctr"/>
-          <a:lstStyle xmlns:a="http://schemas.openxmlformats.org/drawingml/2006/main"/>
-          <a:p xmlns:a="http://schemas.openxmlformats.org/drawingml/2006/main">
-            <a:pPr algn="l">
-              <a:defRPr sz="2550" b="1">
-                <a:solidFill>
-                  <a:srgbClr val="15375F"/>
-                </a:solidFill>
-              </a:defRPr>
-            </a:pPr>
-            <a:r>
-              <a:rPr sz="2550" b="1">
-                <a:solidFill>
-                  <a:srgbClr val="15375F"/>
-                </a:solidFill>
-              </a:rPr>
-              <a:t>分三阶段推进，可在 12 个月内完成 HR 数字化转型</a:t>
-            </a:r>
-          </a:p>
-        </p:txBody>
-      </p:sp>
-      <p:sp>
-        <p:nvSpPr>
-          <p:cNvPr id="2" name="scqa-1">
-            <a:extLst xmlns:a="http://schemas.openxmlformats.org/drawingml/2006/main">
-              <a:ext uri="{FF2B5EF4-FFF2-40B4-BE49-F238E27FC236}">
-                <a16:creationId xmlns:a16="http://schemas.microsoft.com/office/drawing/2014/main" id="{04904B7F-841D-43C0-8DB5-6CD765B0AABE}"/>
-              </a:ext>
-            </a:extLst>
-          </p:cNvPr>
-          <p:cNvSpPr>
-            <a:spLocks xmlns:a="http://schemas.openxmlformats.org/drawingml/2006/main" noGrp="1"/>
-          </p:cNvSpPr>
-          <p:nvPr/>
-        </p:nvSpPr>
-        <p:spPr>
-          <a:xfrm xmlns:a="http://schemas.openxmlformats.org/drawingml/2006/main">
-            <a:off x="514350" y="1190625"/>
-            <a:ext cx="2633663" cy="1257300"/>
-          </a:xfrm>
-          <a:prstGeom xmlns:a="http://schemas.openxmlformats.org/drawingml/2006/main" prst="roundRect">
-            <a:avLst>
-              <a:gd name="adj" fmla="val 6061"/>
-            </a:avLst>
-          </a:prstGeom>
-          <a:solidFill xmlns:a="http://schemas.openxmlformats.org/drawingml/2006/main">
-            <a:srgbClr val="F4F6F8"/>
-          </a:solidFill>
-          <a:ln xmlns:a="http://schemas.openxmlformats.org/drawingml/2006/main" w="12383">
-            <a:solidFill>
-              <a:srgbClr val="D7DEE8"/>
-            </a:solidFill>
-            <a:prstDash val="solid"/>
-          </a:ln>
-        </p:spPr>
-        <p:txBody>
-          <a:bodyPr xmlns:a="http://schemas.openxmlformats.org/drawingml/2006/main" anchor="ctr"/>
-          <a:lstStyle xmlns:a="http://schemas.openxmlformats.org/drawingml/2006/main"/>
-          <a:p xmlns:a="http://schemas.openxmlformats.org/drawingml/2006/main">
-            <a:pPr algn="ctr">
-              <a:defRPr sz="1600" b="1">
-                <a:solidFill>
-                  <a:srgbClr val="172033"/>
-                </a:solidFill>
-              </a:defRPr>
-            </a:pPr>
-            <a:r>
-              <a:rPr sz="1600" b="1">
-                <a:solidFill>
-                  <a:srgbClr val="172033"/>
-                </a:solidFill>
-              </a:rPr>
-              <a:t>S 情境</a:t>
-            </a:r>
-          </a:p>
-          <a:p xmlns:a="http://schemas.openxmlformats.org/drawingml/2006/main">
-            <a:pPr algn="ctr">
-              <a:defRPr sz="1600" b="1">
-                <a:solidFill>
-                  <a:srgbClr val="172033"/>
-                </a:solidFill>
-              </a:defRPr>
-            </a:pPr>
-            <a:r>
-              <a:rPr sz="1600" b="1">
-                <a:solidFill>
-                  <a:srgbClr val="172033"/>
-                </a:solidFill>
-              </a:rPr>
-              <a:t>现有系统分散，数据口径不统一</a:t>
-            </a:r>
-          </a:p>
-        </p:txBody>
-      </p:sp>
-      <p:sp>
-        <p:nvSpPr>
-          <p:cNvPr id="3" name="scqa-2">
-            <a:extLst xmlns:a="http://schemas.openxmlformats.org/drawingml/2006/main">
-              <a:ext uri="{FF2B5EF4-FFF2-40B4-BE49-F238E27FC236}">
-                <a16:creationId xmlns:a16="http://schemas.microsoft.com/office/drawing/2014/main" id="{2E39F356-076D-4B93-9978-EEC7A224120F}"/>
-              </a:ext>
-            </a:extLst>
-          </p:cNvPr>
-          <p:cNvSpPr>
-            <a:spLocks xmlns:a="http://schemas.openxmlformats.org/drawingml/2006/main" noGrp="1"/>
-          </p:cNvSpPr>
-          <p:nvPr/>
-        </p:nvSpPr>
-        <p:spPr>
-          <a:xfrm xmlns:a="http://schemas.openxmlformats.org/drawingml/2006/main">
-            <a:off x="3357563" y="1190625"/>
-            <a:ext cx="2633663" cy="1257300"/>
-          </a:xfrm>
-          <a:prstGeom xmlns:a="http://schemas.openxmlformats.org/drawingml/2006/main" prst="roundRect">
-            <a:avLst>
-              <a:gd name="adj" fmla="val 6061"/>
-            </a:avLst>
-          </a:prstGeom>
-          <a:solidFill xmlns:a="http://schemas.openxmlformats.org/drawingml/2006/main">
-            <a:srgbClr val="FFF0E2"/>
-          </a:solidFill>
-          <a:ln xmlns:a="http://schemas.openxmlformats.org/drawingml/2006/main" w="12383">
-            <a:solidFill>
-              <a:srgbClr val="E8872D"/>
-            </a:solidFill>
-            <a:prstDash val="solid"/>
-          </a:ln>
-        </p:spPr>
-        <p:txBody>
-          <a:bodyPr xmlns:a="http://schemas.openxmlformats.org/drawingml/2006/main" anchor="ctr"/>
-          <a:lstStyle xmlns:a="http://schemas.openxmlformats.org/drawingml/2006/main"/>
-          <a:p xmlns:a="http://schemas.openxmlformats.org/drawingml/2006/main">
-            <a:pPr algn="ctr">
-              <a:defRPr sz="1600" b="1">
-                <a:solidFill>
-                  <a:srgbClr val="172033"/>
-                </a:solidFill>
-              </a:defRPr>
-            </a:pPr>
-            <a:r>
-              <a:rPr sz="1600" b="1">
-                <a:solidFill>
-                  <a:srgbClr val="172033"/>
-                </a:solidFill>
-              </a:rPr>
-              <a:t>C 冲突</a:t>
-            </a:r>
-          </a:p>
-          <a:p xmlns:a="http://schemas.openxmlformats.org/drawingml/2006/main">
-            <a:pPr algn="ctr">
-              <a:defRPr sz="1600" b="1">
-                <a:solidFill>
-                  <a:srgbClr val="172033"/>
-                </a:solidFill>
-              </a:defRPr>
-            </a:pPr>
-            <a:r>
-              <a:rPr sz="1600" b="1">
-                <a:solidFill>
-                  <a:srgbClr val="172033"/>
-                </a:solidFill>
-              </a:rPr>
-              <a:t>业务需求增长快，但交付能力不足</a:t>
-            </a:r>
-          </a:p>
-        </p:txBody>
-      </p:sp>
-      <p:sp>
-        <p:nvSpPr>
-          <p:cNvPr id="4" name="scqa-3">
-            <a:extLst xmlns:a="http://schemas.openxmlformats.org/drawingml/2006/main">
-              <a:ext uri="{FF2B5EF4-FFF2-40B4-BE49-F238E27FC236}">
-                <a16:creationId xmlns:a16="http://schemas.microsoft.com/office/drawing/2014/main" id="{91709CD8-5F60-4B6B-BA04-8BD15B613EDB}"/>
-              </a:ext>
-            </a:extLst>
-          </p:cNvPr>
-          <p:cNvSpPr>
-            <a:spLocks xmlns:a="http://schemas.openxmlformats.org/drawingml/2006/main" noGrp="1"/>
-          </p:cNvSpPr>
-          <p:nvPr/>
-        </p:nvSpPr>
-        <p:spPr>
-          <a:xfrm xmlns:a="http://schemas.openxmlformats.org/drawingml/2006/main">
-            <a:off x="6200775" y="1190625"/>
-            <a:ext cx="2633663" cy="1257300"/>
-          </a:xfrm>
-          <a:prstGeom xmlns:a="http://schemas.openxmlformats.org/drawingml/2006/main" prst="roundRect">
-            <a:avLst>
-              <a:gd name="adj" fmla="val 6061"/>
-            </a:avLst>
-          </a:prstGeom>
-          <a:solidFill xmlns:a="http://schemas.openxmlformats.org/drawingml/2006/main">
-            <a:srgbClr val="F4F6F8"/>
-          </a:solidFill>
-          <a:ln xmlns:a="http://schemas.openxmlformats.org/drawingml/2006/main" w="12383">
-            <a:solidFill>
-              <a:srgbClr val="D7DEE8"/>
-            </a:solidFill>
-            <a:prstDash val="solid"/>
-          </a:ln>
-        </p:spPr>
-        <p:txBody>
-          <a:bodyPr xmlns:a="http://schemas.openxmlformats.org/drawingml/2006/main" anchor="ctr"/>
-          <a:lstStyle xmlns:a="http://schemas.openxmlformats.org/drawingml/2006/main"/>
-          <a:p xmlns:a="http://schemas.openxmlformats.org/drawingml/2006/main">
-            <a:pPr algn="ctr">
-              <a:defRPr sz="1600" b="1">
-                <a:solidFill>
-                  <a:srgbClr val="172033"/>
-                </a:solidFill>
-              </a:defRPr>
-            </a:pPr>
-            <a:r>
-              <a:rPr sz="1600" b="1">
-                <a:solidFill>
-                  <a:srgbClr val="172033"/>
-                </a:solidFill>
-              </a:rPr>
-              <a:t>Q 问题</a:t>
-            </a:r>
-          </a:p>
-          <a:p xmlns:a="http://schemas.openxmlformats.org/drawingml/2006/main">
-            <a:pPr algn="ctr">
-              <a:defRPr sz="1600" b="1">
-                <a:solidFill>
-                  <a:srgbClr val="172033"/>
-                </a:solidFill>
-              </a:defRPr>
-            </a:pPr>
-            <a:r>
-              <a:rPr sz="1600" b="1">
-                <a:solidFill>
-                  <a:srgbClr val="172033"/>
-                </a:solidFill>
-              </a:rPr>
-              <a:t>如何在不中断业务的前提下完成转型</a:t>
-            </a:r>
-          </a:p>
-        </p:txBody>
-      </p:sp>
-      <p:sp>
-        <p:nvSpPr>
-          <p:cNvPr id="5" name="scqa-4">
-            <a:extLst xmlns:a="http://schemas.openxmlformats.org/drawingml/2006/main">
-              <a:ext uri="{FF2B5EF4-FFF2-40B4-BE49-F238E27FC236}">
-                <a16:creationId xmlns:a16="http://schemas.microsoft.com/office/drawing/2014/main" id="{82358893-C0C9-4A16-AE3A-85D0AD052D32}"/>
-              </a:ext>
-            </a:extLst>
-          </p:cNvPr>
-          <p:cNvSpPr>
-            <a:spLocks xmlns:a="http://schemas.openxmlformats.org/drawingml/2006/main" noGrp="1"/>
-          </p:cNvSpPr>
-          <p:nvPr/>
-        </p:nvSpPr>
-        <p:spPr>
-          <a:xfrm xmlns:a="http://schemas.openxmlformats.org/drawingml/2006/main">
-            <a:off x="9043988" y="1190625"/>
-            <a:ext cx="2633663" cy="1257300"/>
-          </a:xfrm>
-          <a:prstGeom xmlns:a="http://schemas.openxmlformats.org/drawingml/2006/main" prst="roundRect">
-            <a:avLst>
-              <a:gd name="adj" fmla="val 6061"/>
-            </a:avLst>
-          </a:prstGeom>
-          <a:solidFill xmlns:a="http://schemas.openxmlformats.org/drawingml/2006/main">
-            <a:srgbClr val="15375F"/>
-          </a:solidFill>
-          <a:ln xmlns:a="http://schemas.openxmlformats.org/drawingml/2006/main" w="0">
-            <a:solidFill>
-              <a:srgbClr val="D7DEE8"/>
-            </a:solidFill>
-            <a:prstDash val="solid"/>
-          </a:ln>
-        </p:spPr>
-        <p:txBody>
-          <a:bodyPr xmlns:a="http://schemas.openxmlformats.org/drawingml/2006/main" anchor="ctr"/>
-          <a:lstStyle xmlns:a="http://schemas.openxmlformats.org/drawingml/2006/main"/>
-          <a:p xmlns:a="http://schemas.openxmlformats.org/drawingml/2006/main">
-            <a:pPr algn="ctr">
-              <a:defRPr sz="1600" b="1">
-                <a:solidFill>
-                  <a:srgbClr val="FFFFFF"/>
-                </a:solidFill>
-              </a:defRPr>
-            </a:pPr>
-            <a:r>
-              <a:rPr sz="1600" b="1">
-                <a:solidFill>
-                  <a:srgbClr val="FFFFFF"/>
-                </a:solidFill>
-              </a:rPr>
-              <a:t>A 答案</a:t>
-            </a:r>
-          </a:p>
-          <a:p xmlns:a="http://schemas.openxmlformats.org/drawingml/2006/main">
-            <a:pPr algn="ctr">
-              <a:defRPr sz="1600" b="1">
-                <a:solidFill>
-                  <a:srgbClr val="FFFFFF"/>
-                </a:solidFill>
-              </a:defRPr>
-            </a:pPr>
-            <a:r>
-              <a:rPr sz="1600" b="1">
-                <a:solidFill>
-                  <a:srgbClr val="FFFFFF"/>
-                </a:solidFill>
-              </a:rPr>
-              <a:t>采用试点、复制、固化三阶段路径</a:t>
-            </a:r>
-          </a:p>
-        </p:txBody>
-      </p:sp>
-      <p:sp>
-        <p:nvSpPr>
-          <p:cNvPr id="9" name="stage-1-header">
-            <a:extLst xmlns:a="http://schemas.openxmlformats.org/drawingml/2006/main">
-              <a:ext uri="{FF2B5EF4-FFF2-40B4-BE49-F238E27FC236}">
-                <a16:creationId xmlns:a16="http://schemas.microsoft.com/office/drawing/2014/main" id="{B64162D0-B79C-43E6-A577-9F657AB2A4CB}"/>
-              </a:ext>
-            </a:extLst>
-          </p:cNvPr>
-          <p:cNvSpPr>
-            <a:spLocks xmlns:a="http://schemas.openxmlformats.org/drawingml/2006/main" noGrp="1"/>
-          </p:cNvSpPr>
-          <p:nvPr/>
-        </p:nvSpPr>
-        <p:spPr>
-          <a:xfrm xmlns:a="http://schemas.openxmlformats.org/drawingml/2006/main">
-            <a:off x="1943100" y="2857500"/>
-            <a:ext cx="3244850" cy="514350"/>
-          </a:xfrm>
-          <a:prstGeom xmlns:a="http://schemas.openxmlformats.org/drawingml/2006/main" prst="rect">
-            <a:avLst/>
-          </a:prstGeom>
-          <a:solidFill xmlns:a="http://schemas.openxmlformats.org/drawingml/2006/main">
-            <a:srgbClr val="E9F1FA"/>
-          </a:solidFill>
-          <a:ln xmlns:a="http://schemas.openxmlformats.org/drawingml/2006/main" w="9525">
-            <a:solidFill>
-              <a:srgbClr val="D7DEE8"/>
-            </a:solidFill>
-            <a:prstDash val="solid"/>
-          </a:ln>
-        </p:spPr>
-        <p:txBody>
-          <a:bodyPr xmlns:a="http://schemas.openxmlformats.org/drawingml/2006/main" anchor="ctr"/>
-          <a:lstStyle xmlns:a="http://schemas.openxmlformats.org/drawingml/2006/main"/>
-          <a:p xmlns:a="http://schemas.openxmlformats.org/drawingml/2006/main">
-            <a:pPr algn="ctr">
-              <a:defRPr sz="1600" b="1">
-                <a:solidFill>
-                  <a:srgbClr val="15375F"/>
-                </a:solidFill>
-              </a:defRPr>
-            </a:pPr>
-            <a:r>
-              <a:rPr sz="1600" b="1">
-                <a:solidFill>
-                  <a:srgbClr val="15375F"/>
-                </a:solidFill>
-              </a:rPr>
-              <a:t>0–3 月</a:t>
-            </a:r>
-          </a:p>
-          <a:p xmlns:a="http://schemas.openxmlformats.org/drawingml/2006/main">
-            <a:pPr algn="ctr">
-              <a:defRPr sz="1600" b="1">
-                <a:solidFill>
-                  <a:srgbClr val="15375F"/>
-                </a:solidFill>
-              </a:defRPr>
-            </a:pPr>
-            <a:r>
-              <a:rPr sz="1600" b="1">
-                <a:solidFill>
-                  <a:srgbClr val="15375F"/>
-                </a:solidFill>
-              </a:rPr>
-              <a:t>◆ 试点验收通过</a:t>
-            </a:r>
-          </a:p>
-        </p:txBody>
-      </p:sp>
-      <p:sp>
-        <p:nvSpPr>
-          <p:cNvPr id="10" name="lane-label-1">
-            <a:extLst xmlns:a="http://schemas.openxmlformats.org/drawingml/2006/main">
-              <a:ext uri="{FF2B5EF4-FFF2-40B4-BE49-F238E27FC236}">
-                <a16:creationId xmlns:a16="http://schemas.microsoft.com/office/drawing/2014/main" id="{6BF66F75-6498-4725-862F-E1AD77CCE429}"/>
-              </a:ext>
-            </a:extLst>
-          </p:cNvPr>
-          <p:cNvSpPr>
-            <a:spLocks xmlns:a="http://schemas.openxmlformats.org/drawingml/2006/main" noGrp="1"/>
-          </p:cNvSpPr>
-          <p:nvPr/>
-        </p:nvSpPr>
-        <p:spPr>
-          <a:xfrm xmlns:a="http://schemas.openxmlformats.org/drawingml/2006/main">
-            <a:off x="514350" y="3371850"/>
-            <a:ext cx="1428750" cy="1314450"/>
-          </a:xfrm>
-          <a:prstGeom xmlns:a="http://schemas.openxmlformats.org/drawingml/2006/main" prst="rect">
-            <a:avLst/>
-          </a:prstGeom>
-          <a:solidFill xmlns:a="http://schemas.openxmlformats.org/drawingml/2006/main">
-            <a:srgbClr val="F4F6F8"/>
-          </a:solidFill>
-          <a:ln xmlns:a="http://schemas.openxmlformats.org/drawingml/2006/main" w="9525">
-            <a:solidFill>
-              <a:srgbClr val="D7DEE8"/>
-            </a:solidFill>
-            <a:prstDash val="solid"/>
-          </a:ln>
-        </p:spPr>
-        <p:txBody>
-          <a:bodyPr xmlns:a="http://schemas.openxmlformats.org/drawingml/2006/main" anchor="ctr"/>
-          <a:lstStyle xmlns:a="http://schemas.openxmlformats.org/drawingml/2006/main"/>
-          <a:p xmlns:a="http://schemas.openxmlformats.org/drawingml/2006/main">
-            <a:pPr algn="ctr">
-              <a:defRPr sz="1600" b="1">
-                <a:solidFill>
-                  <a:srgbClr val="15375F"/>
-                </a:solidFill>
-              </a:defRPr>
-            </a:pPr>
-            <a:r>
-              <a:rPr sz="1600" b="1">
-                <a:solidFill>
-                  <a:srgbClr val="15375F"/>
-                </a:solidFill>
-              </a:rPr>
-              <a:t>组织与流程</a:t>
-            </a:r>
-          </a:p>
-        </p:txBody>
-      </p:sp>
-      <p:sp>
-        <p:nvSpPr>
-          <p:cNvPr id="11" name="stage-1-lane-1">
-            <a:extLst xmlns:a="http://schemas.openxmlformats.org/drawingml/2006/main">
-              <a:ext uri="{FF2B5EF4-FFF2-40B4-BE49-F238E27FC236}">
-                <a16:creationId xmlns:a16="http://schemas.microsoft.com/office/drawing/2014/main" id="{C12C8422-47F5-4E97-A5F5-A0D72E667D67}"/>
-              </a:ext>
-            </a:extLst>
-          </p:cNvPr>
-          <p:cNvSpPr>
-            <a:spLocks xmlns:a="http://schemas.openxmlformats.org/drawingml/2006/main" noGrp="1"/>
-          </p:cNvSpPr>
-          <p:nvPr/>
-        </p:nvSpPr>
-        <p:spPr>
-          <a:xfrm xmlns:a="http://schemas.openxmlformats.org/drawingml/2006/main">
-            <a:off x="1943100" y="3371850"/>
-            <a:ext cx="3244850" cy="1314450"/>
-          </a:xfrm>
-          <a:prstGeom xmlns:a="http://schemas.openxmlformats.org/drawingml/2006/main" prst="rect">
-            <a:avLst/>
-          </a:prstGeom>
-          <a:solidFill xmlns:a="http://schemas.openxmlformats.org/drawingml/2006/main">
-            <a:srgbClr val="FFFFFF"/>
-          </a:solidFill>
-          <a:ln xmlns:a="http://schemas.openxmlformats.org/drawingml/2006/main" w="9525">
-            <a:solidFill>
-              <a:srgbClr val="D7DEE8"/>
-            </a:solidFill>
-            <a:prstDash val="solid"/>
-          </a:ln>
-        </p:spPr>
-        <p:txBody>
-          <a:bodyPr xmlns:a="http://schemas.openxmlformats.org/drawingml/2006/main" anchor="ctr"/>
-          <a:lstStyle xmlns:a="http://schemas.openxmlformats.org/drawingml/2006/main"/>
-          <a:p xmlns:a="http://schemas.openxmlformats.org/drawingml/2006/main">
-            <a:pPr algn="ctr">
-              <a:defRPr sz="1600" b="0">
-                <a:solidFill>
-                  <a:srgbClr val="172033"/>
-                </a:solidFill>
-              </a:defRPr>
-            </a:pPr>
-            <a:r>
-              <a:rPr sz="1600" b="0">
-                <a:solidFill>
-                  <a:srgbClr val="172033"/>
-                </a:solidFill>
-              </a:rPr>
-              <a:t>完成流程梳理</a:t>
-            </a:r>
-          </a:p>
-        </p:txBody>
-      </p:sp>
-      <p:sp>
-        <p:nvSpPr>
-          <p:cNvPr id="12" name="lane-label-2">
-            <a:extLst xmlns:a="http://schemas.openxmlformats.org/drawingml/2006/main">
-              <a:ext uri="{FF2B5EF4-FFF2-40B4-BE49-F238E27FC236}">
-                <a16:creationId xmlns:a16="http://schemas.microsoft.com/office/drawing/2014/main" id="{50FEA97C-74C1-49CB-883E-B8C64F54D4C6}"/>
-              </a:ext>
-            </a:extLst>
-          </p:cNvPr>
-          <p:cNvSpPr>
-            <a:spLocks xmlns:a="http://schemas.openxmlformats.org/drawingml/2006/main" noGrp="1"/>
-          </p:cNvSpPr>
-          <p:nvPr/>
-        </p:nvSpPr>
-        <p:spPr>
-          <a:xfrm xmlns:a="http://schemas.openxmlformats.org/drawingml/2006/main">
-            <a:off x="514350" y="4686300"/>
-            <a:ext cx="1428750" cy="1314450"/>
-          </a:xfrm>
-          <a:prstGeom xmlns:a="http://schemas.openxmlformats.org/drawingml/2006/main" prst="rect">
-            <a:avLst/>
-          </a:prstGeom>
-          <a:solidFill xmlns:a="http://schemas.openxmlformats.org/drawingml/2006/main">
-            <a:srgbClr val="F4F6F8"/>
-          </a:solidFill>
-          <a:ln xmlns:a="http://schemas.openxmlformats.org/drawingml/2006/main" w="9525">
-            <a:solidFill>
-              <a:srgbClr val="D7DEE8"/>
-            </a:solidFill>
-            <a:prstDash val="solid"/>
-          </a:ln>
-        </p:spPr>
-        <p:txBody>
-          <a:bodyPr xmlns:a="http://schemas.openxmlformats.org/drawingml/2006/main" anchor="ctr"/>
-          <a:lstStyle xmlns:a="http://schemas.openxmlformats.org/drawingml/2006/main"/>
-          <a:p xmlns:a="http://schemas.openxmlformats.org/drawingml/2006/main">
-            <a:pPr algn="ctr">
-              <a:defRPr sz="1600" b="1">
-                <a:solidFill>
-                  <a:srgbClr val="15375F"/>
-                </a:solidFill>
-              </a:defRPr>
-            </a:pPr>
-            <a:r>
-              <a:rPr sz="1600" b="1">
-                <a:solidFill>
-                  <a:srgbClr val="15375F"/>
-                </a:solidFill>
-              </a:rPr>
-              <a:t>技术与工具</a:t>
-            </a:r>
-          </a:p>
-        </p:txBody>
-      </p:sp>
-      <p:sp>
-        <p:nvSpPr>
-          <p:cNvPr id="13" name="stage-1-lane-2">
-            <a:extLst xmlns:a="http://schemas.openxmlformats.org/drawingml/2006/main">
-              <a:ext uri="{FF2B5EF4-FFF2-40B4-BE49-F238E27FC236}">
-                <a16:creationId xmlns:a16="http://schemas.microsoft.com/office/drawing/2014/main" id="{63EADA2C-408C-452E-A961-14E099B4B99D}"/>
-              </a:ext>
-            </a:extLst>
-          </p:cNvPr>
-          <p:cNvSpPr>
-            <a:spLocks xmlns:a="http://schemas.openxmlformats.org/drawingml/2006/main" noGrp="1"/>
-          </p:cNvSpPr>
-          <p:nvPr/>
-        </p:nvSpPr>
-        <p:spPr>
-          <a:xfrm xmlns:a="http://schemas.openxmlformats.org/drawingml/2006/main">
-            <a:off x="1943100" y="4686300"/>
-            <a:ext cx="3244850" cy="1314450"/>
-          </a:xfrm>
-          <a:prstGeom xmlns:a="http://schemas.openxmlformats.org/drawingml/2006/main" prst="rect">
-            <a:avLst/>
-          </a:prstGeom>
-          <a:solidFill xmlns:a="http://schemas.openxmlformats.org/drawingml/2006/main">
-            <a:srgbClr val="FFFFFF"/>
-          </a:solidFill>
-          <a:ln xmlns:a="http://schemas.openxmlformats.org/drawingml/2006/main" w="9525">
-            <a:solidFill>
-              <a:srgbClr val="D7DEE8"/>
-            </a:solidFill>
-            <a:prstDash val="solid"/>
-          </a:ln>
-        </p:spPr>
-        <p:txBody>
-          <a:bodyPr xmlns:a="http://schemas.openxmlformats.org/drawingml/2006/main" anchor="ctr"/>
-          <a:lstStyle xmlns:a="http://schemas.openxmlformats.org/drawingml/2006/main"/>
-          <a:p xmlns:a="http://schemas.openxmlformats.org/drawingml/2006/main">
-            <a:pPr algn="ctr">
-              <a:defRPr sz="1600" b="0">
-                <a:solidFill>
-                  <a:srgbClr val="172033"/>
-                </a:solidFill>
-              </a:defRPr>
-            </a:pPr>
-            <a:r>
-              <a:rPr sz="1600" b="0">
-                <a:solidFill>
-                  <a:srgbClr val="172033"/>
-                </a:solidFill>
-              </a:rPr>
-              <a:t>上线最小可用版本</a:t>
-            </a:r>
-          </a:p>
-        </p:txBody>
-      </p:sp>
-      <p:sp>
-        <p:nvSpPr>
-          <p:cNvPr id="14" name="stage-2-header">
-            <a:extLst xmlns:a="http://schemas.openxmlformats.org/drawingml/2006/main">
-              <a:ext uri="{FF2B5EF4-FFF2-40B4-BE49-F238E27FC236}">
-                <a16:creationId xmlns:a16="http://schemas.microsoft.com/office/drawing/2014/main" id="{F1B090B4-24BE-45D6-8738-7AC0F8EF6C07}"/>
-              </a:ext>
-            </a:extLst>
-          </p:cNvPr>
-          <p:cNvSpPr>
-            <a:spLocks xmlns:a="http://schemas.openxmlformats.org/drawingml/2006/main" noGrp="1"/>
-          </p:cNvSpPr>
-          <p:nvPr/>
-        </p:nvSpPr>
-        <p:spPr>
-          <a:xfrm xmlns:a="http://schemas.openxmlformats.org/drawingml/2006/main">
-            <a:off x="5187950" y="2857500"/>
-            <a:ext cx="3244850" cy="514350"/>
-          </a:xfrm>
-          <a:prstGeom xmlns:a="http://schemas.openxmlformats.org/drawingml/2006/main" prst="rect">
-            <a:avLst/>
-          </a:prstGeom>
-          <a:solidFill xmlns:a="http://schemas.openxmlformats.org/drawingml/2006/main">
-            <a:srgbClr val="F4F6F8"/>
-          </a:solidFill>
-          <a:ln xmlns:a="http://schemas.openxmlformats.org/drawingml/2006/main" w="9525">
-            <a:solidFill>
-              <a:srgbClr val="D7DEE8"/>
-            </a:solidFill>
-            <a:prstDash val="solid"/>
-          </a:ln>
-        </p:spPr>
-        <p:txBody>
-          <a:bodyPr xmlns:a="http://schemas.openxmlformats.org/drawingml/2006/main" anchor="ctr"/>
-          <a:lstStyle xmlns:a="http://schemas.openxmlformats.org/drawingml/2006/main"/>
-          <a:p xmlns:a="http://schemas.openxmlformats.org/drawingml/2006/main">
-            <a:pPr algn="ctr">
-              <a:defRPr sz="1600" b="1">
-                <a:solidFill>
-                  <a:srgbClr val="15375F"/>
-                </a:solidFill>
-              </a:defRPr>
-            </a:pPr>
-            <a:r>
-              <a:rPr sz="1600" b="1">
-                <a:solidFill>
-                  <a:srgbClr val="15375F"/>
-                </a:solidFill>
-              </a:rPr>
-              <a:t>4–8 月</a:t>
-            </a:r>
-          </a:p>
-          <a:p xmlns:a="http://schemas.openxmlformats.org/drawingml/2006/main">
-            <a:pPr algn="ctr">
-              <a:defRPr sz="1600" b="1">
-                <a:solidFill>
-                  <a:srgbClr val="15375F"/>
-                </a:solidFill>
-              </a:defRPr>
-            </a:pPr>
-            <a:r>
-              <a:rPr sz="1600" b="1">
-                <a:solidFill>
-                  <a:srgbClr val="15375F"/>
-                </a:solidFill>
-              </a:rPr>
-              <a:t>◆ 覆盖率达到 60%</a:t>
-            </a:r>
-          </a:p>
-        </p:txBody>
-      </p:sp>
-      <p:sp>
-        <p:nvSpPr>
-          <p:cNvPr id="15" name="stage-2-lane-1">
-            <a:extLst xmlns:a="http://schemas.openxmlformats.org/drawingml/2006/main">
-              <a:ext uri="{FF2B5EF4-FFF2-40B4-BE49-F238E27FC236}">
-                <a16:creationId xmlns:a16="http://schemas.microsoft.com/office/drawing/2014/main" id="{A4875AC3-7BCF-4809-9287-852DC6C4F674}"/>
-              </a:ext>
-            </a:extLst>
-          </p:cNvPr>
-          <p:cNvSpPr>
-            <a:spLocks xmlns:a="http://schemas.openxmlformats.org/drawingml/2006/main" noGrp="1"/>
-          </p:cNvSpPr>
-          <p:nvPr/>
-        </p:nvSpPr>
-        <p:spPr>
-          <a:xfrm xmlns:a="http://schemas.openxmlformats.org/drawingml/2006/main">
-            <a:off x="5187950" y="3371850"/>
-            <a:ext cx="3244850" cy="1314450"/>
-          </a:xfrm>
-          <a:prstGeom xmlns:a="http://schemas.openxmlformats.org/drawingml/2006/main" prst="rect">
-            <a:avLst/>
-          </a:prstGeom>
-          <a:solidFill xmlns:a="http://schemas.openxmlformats.org/drawingml/2006/main">
-            <a:srgbClr val="FFFFFF"/>
-          </a:solidFill>
-          <a:ln xmlns:a="http://schemas.openxmlformats.org/drawingml/2006/main" w="9525">
-            <a:solidFill>
-              <a:srgbClr val="D7DEE8"/>
-            </a:solidFill>
-            <a:prstDash val="solid"/>
-          </a:ln>
-        </p:spPr>
-        <p:txBody>
-          <a:bodyPr xmlns:a="http://schemas.openxmlformats.org/drawingml/2006/main" anchor="ctr"/>
-          <a:lstStyle xmlns:a="http://schemas.openxmlformats.org/drawingml/2006/main"/>
-          <a:p xmlns:a="http://schemas.openxmlformats.org/drawingml/2006/main">
-            <a:pPr algn="ctr">
-              <a:defRPr sz="1600" b="0">
-                <a:solidFill>
-                  <a:srgbClr val="172033"/>
-                </a:solidFill>
-              </a:defRPr>
-            </a:pPr>
-            <a:r>
-              <a:rPr sz="1600" b="0">
-                <a:solidFill>
-                  <a:srgbClr val="172033"/>
-                </a:solidFill>
-              </a:rPr>
-              <a:t>复制标准流程</a:t>
-            </a:r>
-          </a:p>
-        </p:txBody>
-      </p:sp>
-      <p:sp>
-        <p:nvSpPr>
-          <p:cNvPr id="16" name="stage-2-lane-2">
-            <a:extLst xmlns:a="http://schemas.openxmlformats.org/drawingml/2006/main">
-              <a:ext uri="{FF2B5EF4-FFF2-40B4-BE49-F238E27FC236}">
-                <a16:creationId xmlns:a16="http://schemas.microsoft.com/office/drawing/2014/main" id="{EE0BB40D-380D-4B7B-8F33-EBB46AF8F348}"/>
-              </a:ext>
-            </a:extLst>
-          </p:cNvPr>
-          <p:cNvSpPr>
-            <a:spLocks xmlns:a="http://schemas.openxmlformats.org/drawingml/2006/main" noGrp="1"/>
-          </p:cNvSpPr>
-          <p:nvPr/>
-        </p:nvSpPr>
-        <p:spPr>
-          <a:xfrm xmlns:a="http://schemas.openxmlformats.org/drawingml/2006/main">
-            <a:off x="5187950" y="4686300"/>
-            <a:ext cx="3244850" cy="1314450"/>
-          </a:xfrm>
-          <a:prstGeom xmlns:a="http://schemas.openxmlformats.org/drawingml/2006/main" prst="rect">
-            <a:avLst/>
-          </a:prstGeom>
-          <a:solidFill xmlns:a="http://schemas.openxmlformats.org/drawingml/2006/main">
-            <a:srgbClr val="FFFFFF"/>
-          </a:solidFill>
-          <a:ln xmlns:a="http://schemas.openxmlformats.org/drawingml/2006/main" w="9525">
-            <a:solidFill>
-              <a:srgbClr val="D7DEE8"/>
-            </a:solidFill>
-            <a:prstDash val="solid"/>
-          </a:ln>
-        </p:spPr>
-        <p:txBody>
-          <a:bodyPr xmlns:a="http://schemas.openxmlformats.org/drawingml/2006/main" anchor="ctr"/>
-          <a:lstStyle xmlns:a="http://schemas.openxmlformats.org/drawingml/2006/main"/>
-          <a:p xmlns:a="http://schemas.openxmlformats.org/drawingml/2006/main">
-            <a:pPr algn="ctr">
-              <a:defRPr sz="1600" b="0">
-                <a:solidFill>
-                  <a:srgbClr val="172033"/>
-                </a:solidFill>
-              </a:defRPr>
-            </a:pPr>
-            <a:r>
-              <a:rPr sz="1600" b="0">
-                <a:solidFill>
-                  <a:srgbClr val="172033"/>
-                </a:solidFill>
-              </a:rPr>
-              <a:t>扩展核心接口</a:t>
-            </a:r>
-          </a:p>
-        </p:txBody>
-      </p:sp>
-      <p:sp>
-        <p:nvSpPr>
-          <p:cNvPr id="17" name="stage-3-header">
-            <a:extLst xmlns:a="http://schemas.openxmlformats.org/drawingml/2006/main">
-              <a:ext uri="{FF2B5EF4-FFF2-40B4-BE49-F238E27FC236}">
-                <a16:creationId xmlns:a16="http://schemas.microsoft.com/office/drawing/2014/main" id="{B666F043-C9D9-4AAE-8460-56A356A6A826}"/>
-              </a:ext>
-            </a:extLst>
-          </p:cNvPr>
-          <p:cNvSpPr>
-            <a:spLocks xmlns:a="http://schemas.openxmlformats.org/drawingml/2006/main" noGrp="1"/>
-          </p:cNvSpPr>
-          <p:nvPr/>
-        </p:nvSpPr>
-        <p:spPr>
-          <a:xfrm xmlns:a="http://schemas.openxmlformats.org/drawingml/2006/main">
-            <a:off x="8432800" y="2857500"/>
-            <a:ext cx="3244850" cy="514350"/>
-          </a:xfrm>
-          <a:prstGeom xmlns:a="http://schemas.openxmlformats.org/drawingml/2006/main" prst="rect">
-            <a:avLst/>
-          </a:prstGeom>
-          <a:solidFill xmlns:a="http://schemas.openxmlformats.org/drawingml/2006/main">
-            <a:srgbClr val="E9F1FA"/>
-          </a:solidFill>
-          <a:ln xmlns:a="http://schemas.openxmlformats.org/drawingml/2006/main" w="9525">
-            <a:solidFill>
-              <a:srgbClr val="D7DEE8"/>
-            </a:solidFill>
-            <a:prstDash val="solid"/>
-          </a:ln>
-        </p:spPr>
-        <p:txBody>
-          <a:bodyPr xmlns:a="http://schemas.openxmlformats.org/drawingml/2006/main" anchor="ctr"/>
-          <a:lstStyle xmlns:a="http://schemas.openxmlformats.org/drawingml/2006/main"/>
-          <a:p xmlns:a="http://schemas.openxmlformats.org/drawingml/2006/main">
-            <a:pPr algn="ctr">
-              <a:defRPr sz="1600" b="1">
-                <a:solidFill>
-                  <a:srgbClr val="15375F"/>
-                </a:solidFill>
-              </a:defRPr>
-            </a:pPr>
-            <a:r>
-              <a:rPr sz="1600" b="1">
-                <a:solidFill>
-                  <a:srgbClr val="15375F"/>
-                </a:solidFill>
-              </a:rPr>
-              <a:t>9–12 月</a:t>
-            </a:r>
-          </a:p>
-          <a:p xmlns:a="http://schemas.openxmlformats.org/drawingml/2006/main">
-            <a:pPr algn="ctr">
-              <a:defRPr sz="1600" b="1">
-                <a:solidFill>
-                  <a:srgbClr val="15375F"/>
-                </a:solidFill>
-              </a:defRPr>
-            </a:pPr>
-            <a:r>
-              <a:rPr sz="1600" b="1">
-                <a:solidFill>
-                  <a:srgbClr val="15375F"/>
-                </a:solidFill>
-              </a:rPr>
-              <a:t>◆ 运营指标达标</a:t>
-            </a:r>
-          </a:p>
-        </p:txBody>
-      </p:sp>
-      <p:sp>
-        <p:nvSpPr>
-          <p:cNvPr id="18" name="stage-3-lane-1">
-            <a:extLst xmlns:a="http://schemas.openxmlformats.org/drawingml/2006/main">
-              <a:ext uri="{FF2B5EF4-FFF2-40B4-BE49-F238E27FC236}">
-                <a16:creationId xmlns:a16="http://schemas.microsoft.com/office/drawing/2014/main" id="{0DC3B75C-EC5F-4155-95FD-827C8C665D61}"/>
-              </a:ext>
-            </a:extLst>
-          </p:cNvPr>
-          <p:cNvSpPr>
-            <a:spLocks xmlns:a="http://schemas.openxmlformats.org/drawingml/2006/main" noGrp="1"/>
-          </p:cNvSpPr>
-          <p:nvPr/>
-        </p:nvSpPr>
-        <p:spPr>
-          <a:xfrm xmlns:a="http://schemas.openxmlformats.org/drawingml/2006/main">
-            <a:off x="8432800" y="3371850"/>
-            <a:ext cx="3244850" cy="1314450"/>
-          </a:xfrm>
-          <a:prstGeom xmlns:a="http://schemas.openxmlformats.org/drawingml/2006/main" prst="rect">
-            <a:avLst/>
-          </a:prstGeom>
-          <a:solidFill xmlns:a="http://schemas.openxmlformats.org/drawingml/2006/main">
-            <a:srgbClr val="FFFFFF"/>
-          </a:solidFill>
-          <a:ln xmlns:a="http://schemas.openxmlformats.org/drawingml/2006/main" w="9525">
-            <a:solidFill>
-              <a:srgbClr val="D7DEE8"/>
-            </a:solidFill>
-            <a:prstDash val="solid"/>
-          </a:ln>
-        </p:spPr>
-        <p:txBody>
-          <a:bodyPr xmlns:a="http://schemas.openxmlformats.org/drawingml/2006/main" anchor="ctr"/>
-          <a:lstStyle xmlns:a="http://schemas.openxmlformats.org/drawingml/2006/main"/>
-          <a:p xmlns:a="http://schemas.openxmlformats.org/drawingml/2006/main">
-            <a:pPr algn="ctr">
-              <a:defRPr sz="1600" b="0">
-                <a:solidFill>
-                  <a:srgbClr val="172033"/>
-                </a:solidFill>
-              </a:defRPr>
-            </a:pPr>
-            <a:r>
-              <a:rPr sz="1600" b="0">
-                <a:solidFill>
-                  <a:srgbClr val="172033"/>
-                </a:solidFill>
-              </a:rPr>
-              <a:t>固化治理机制</a:t>
-            </a:r>
-          </a:p>
-        </p:txBody>
-      </p:sp>
-      <p:sp>
-        <p:nvSpPr>
-          <p:cNvPr id="19" name="stage-3-lane-2">
-            <a:extLst xmlns:a="http://schemas.openxmlformats.org/drawingml/2006/main">
-              <a:ext uri="{FF2B5EF4-FFF2-40B4-BE49-F238E27FC236}">
-                <a16:creationId xmlns:a16="http://schemas.microsoft.com/office/drawing/2014/main" id="{90C9E604-E446-48B2-865F-771C70B8DFE9}"/>
-              </a:ext>
-            </a:extLst>
-          </p:cNvPr>
-          <p:cNvSpPr>
-            <a:spLocks xmlns:a="http://schemas.openxmlformats.org/drawingml/2006/main" noGrp="1"/>
-          </p:cNvSpPr>
-          <p:nvPr/>
-        </p:nvSpPr>
-        <p:spPr>
-          <a:xfrm xmlns:a="http://schemas.openxmlformats.org/drawingml/2006/main">
-            <a:off x="8432800" y="4686300"/>
-            <a:ext cx="3244850" cy="1314450"/>
-          </a:xfrm>
-          <a:prstGeom xmlns:a="http://schemas.openxmlformats.org/drawingml/2006/main" prst="rect">
-            <a:avLst/>
-          </a:prstGeom>
-          <a:solidFill xmlns:a="http://schemas.openxmlformats.org/drawingml/2006/main">
-            <a:srgbClr val="FFFFFF"/>
-          </a:solidFill>
-          <a:ln xmlns:a="http://schemas.openxmlformats.org/drawingml/2006/main" w="9525">
-            <a:solidFill>
-              <a:srgbClr val="D7DEE8"/>
-            </a:solidFill>
-            <a:prstDash val="solid"/>
-          </a:ln>
-        </p:spPr>
-        <p:txBody>
-          <a:bodyPr xmlns:a="http://schemas.openxmlformats.org/drawingml/2006/main" anchor="ctr"/>
-          <a:lstStyle xmlns:a="http://schemas.openxmlformats.org/drawingml/2006/main"/>
-          <a:p xmlns:a="http://schemas.openxmlformats.org/drawingml/2006/main">
-            <a:pPr algn="ctr">
-              <a:defRPr sz="1600" b="0">
-                <a:solidFill>
-                  <a:srgbClr val="172033"/>
-                </a:solidFill>
-              </a:defRPr>
-            </a:pPr>
-            <a:r>
-              <a:rPr sz="1600" b="0">
-                <a:solidFill>
-                  <a:srgbClr val="172033"/>
-                </a:solidFill>
-              </a:rPr>
-              <a:t>建立持续运营</a:t>
-            </a:r>
-          </a:p>
-        </p:txBody>
-      </p:sp>
-    </p:spTree>
-    <p:extLst>
-      <p:ext uri="{BB962C8B-B14F-4D97-AF65-F5344CB8AC3E}">
-        <p14:creationId xmlns:p14="http://schemas.microsoft.com/office/powerpoint/2010/main" val="3182791"/>
-      </p:ext>
-    </p:extLst>
-  </p:cSld>
-</p:sld>
+<file path=ppt/slides/slide1.xml><?xml version="1.0" encoding="utf-8"?><p:sld xmlns:p="http://schemas.openxmlformats.org/presentationml/2006/main"><p:cSld><p:bg><p:bgPr><a:solidFill xmlns:a="http://schemas.openxmlformats.org/drawingml/2006/main"><a:srgbClr val="FFFFFF" /></a:solidFill></p:bgPr></p:bg><p:spTree><p:nvGrpSpPr><p:cNvPr id="1" name="" /><p:cNvGrpSpPr /><p:nvPr /></p:nvGrpSpPr><p:grpSpPr><a:xfrm xmlns:a="http://schemas.openxmlformats.org/drawingml/2006/main" /></p:grpSpPr><p:cxnSp><p:nvCxnSpPr><p:cNvPr id="21" name="" /><p:cNvCxnSpPr><a:stCxn id="5" idx="2" xmlns:a="http://schemas.openxmlformats.org/drawingml/2006/main" /><a:endCxn id="9" idx="0" xmlns:a="http://schemas.openxmlformats.org/drawingml/2006/main" /></p:cNvCxnSpPr><p:nvPr /></p:nvCxnSpPr><p:spPr><a:xfrm flipH="1" xmlns:a="http://schemas.openxmlformats.org/drawingml/2006/main"><a:off x="3565525" y="2447925" /><a:ext cx="6795295" cy="409575" /></a:xfrm><a:prstGeom prst="bentConnector4" xmlns:a="http://schemas.openxmlformats.org/drawingml/2006/main"><a:avLst><a:gd name="adj1" fmla="val 0" /><a:gd name="adj2" fmla="val 50000" /></a:avLst></a:prstGeom><a:ln w="14288" xmlns:a="http://schemas.openxmlformats.org/drawingml/2006/main"><a:solidFill><a:srgbClr val="2F6FB2" /></a:solidFill><a:prstDash val="solid" /><a:tailEnd type="triangle" w="med" len="med" /></a:ln></p:spPr></p:cxnSp><p:cxnSp><p:nvCxnSpPr><p:cNvPr id="22" name="" /><p:cNvCxnSpPr><a:stCxn id="4" idx="3" xmlns:a="http://schemas.openxmlformats.org/drawingml/2006/main" /><a:endCxn id="5" idx="1" xmlns:a="http://schemas.openxmlformats.org/drawingml/2006/main" /></p:cNvCxnSpPr><p:nvPr /></p:nvCxnSpPr><p:spPr><a:xfrm xmlns:a="http://schemas.openxmlformats.org/drawingml/2006/main"><a:off x="8834438" y="1819275" /><a:ext cx="209550" cy="0" /></a:xfrm><a:prstGeom prst="straightConnector1" xmlns:a="http://schemas.openxmlformats.org/drawingml/2006/main"><a:avLst /></a:prstGeom><a:ln w="17145" xmlns:a="http://schemas.openxmlformats.org/drawingml/2006/main"><a:solidFill><a:srgbClr val="2F6FB2" /></a:solidFill><a:prstDash val="solid" /><a:tailEnd type="triangle" w="med" len="med" /></a:ln></p:spPr></p:cxnSp><p:cxnSp><p:nvCxnSpPr><p:cNvPr id="23" name="" /><p:cNvCxnSpPr><a:stCxn id="3" idx="3" xmlns:a="http://schemas.openxmlformats.org/drawingml/2006/main" /><a:endCxn id="4" idx="1" xmlns:a="http://schemas.openxmlformats.org/drawingml/2006/main" /></p:cNvCxnSpPr><p:nvPr /></p:nvCxnSpPr><p:spPr><a:xfrm xmlns:a="http://schemas.openxmlformats.org/drawingml/2006/main"><a:off x="5991226" y="1819275" /><a:ext cx="209549" cy="0" /></a:xfrm><a:prstGeom prst="straightConnector1" xmlns:a="http://schemas.openxmlformats.org/drawingml/2006/main"><a:avLst /></a:prstGeom><a:ln w="17145" xmlns:a="http://schemas.openxmlformats.org/drawingml/2006/main"><a:solidFill><a:srgbClr val="2F6FB2" /></a:solidFill><a:prstDash val="solid" /><a:tailEnd type="triangle" w="med" len="med" /></a:ln></p:spPr></p:cxnSp><p:cxnSp><p:nvCxnSpPr><p:cNvPr id="24" name="" /><p:cNvCxnSpPr><a:stCxn id="2" idx="3" xmlns:a="http://schemas.openxmlformats.org/drawingml/2006/main" /><a:endCxn id="3" idx="1" xmlns:a="http://schemas.openxmlformats.org/drawingml/2006/main" /></p:cNvCxnSpPr><p:nvPr /></p:nvCxnSpPr><p:spPr><a:xfrm xmlns:a="http://schemas.openxmlformats.org/drawingml/2006/main"><a:off x="3148013" y="1819275" /><a:ext cx="209550" cy="0" /></a:xfrm><a:prstGeom prst="straightConnector1" xmlns:a="http://schemas.openxmlformats.org/drawingml/2006/main"><a:avLst /></a:prstGeom><a:ln w="17145" xmlns:a="http://schemas.openxmlformats.org/drawingml/2006/main"><a:solidFill><a:srgbClr val="2F6FB2" /></a:solidFill><a:prstDash val="solid" /><a:tailEnd type="triangle" w="med" len="med" /></a:ln></p:spPr></p:cxnSp><p:sp><p:nvSpPr><p:cNvPr id="25" name="page-title"><a:extLst xmlns:a="http://schemas.openxmlformats.org/drawingml/2006/main"><a:ext uri="{FF2B5EF4-FFF2-40B4-BE49-F238E27FC236}"><a16:creationId id="{679AEFDC-29FA-47D2-A315-5B095E0D1B46}" xmlns:a16="http://schemas.microsoft.com/office/drawing/2014/main" /></a:ext></a:extLst></p:cNvPr><p:cNvSpPr><a:spLocks noGrp="1" xmlns:a="http://schemas.openxmlformats.org/drawingml/2006/main" /></p:cNvSpPr><p:nvPr /></p:nvSpPr><p:spPr><a:xfrm xmlns:a="http://schemas.openxmlformats.org/drawingml/2006/main"><a:off x="514350" y="266700" /><a:ext cx="11163300" cy="495300" /></a:xfrm><a:prstGeom prst="rect" xmlns:a="http://schemas.openxmlformats.org/drawingml/2006/main"><a:avLst /></a:prstGeom><a:noFill xmlns:a="http://schemas.openxmlformats.org/drawingml/2006/main" /><a:ln w="0" xmlns:a="http://schemas.openxmlformats.org/drawingml/2006/main"><a:noFill /><a:prstDash val="solid" /></a:ln></p:spPr><p:txBody><a:bodyPr anchor="ctr" xmlns:a="http://schemas.openxmlformats.org/drawingml/2006/main" /><a:lstStyle xmlns:a="http://schemas.openxmlformats.org/drawingml/2006/main" /><a:p xmlns:a="http://schemas.openxmlformats.org/drawingml/2006/main"><a:pPr algn="l"><a:defRPr sz="2550" b="1"><a:solidFill><a:srgbClr val="15375F" /></a:solidFill></a:defRPr></a:pPr><a:r><a:rPr sz="2550" b="1"><a:solidFill><a:srgbClr val="15375F" /></a:solidFill></a:rPr><a:t>It will be promoted in three stages, which can be 12 Completed within a month HR digital transformation</a:t></a:r></a:p></p:txBody></p:sp><p:sp><p:nvSpPr><p:cNvPr id="2" name="scqa-1"><a:extLst xmlns:a="http://schemas.openxmlformats.org/drawingml/2006/main"><a:ext uri="{FF2B5EF4-FFF2-40B4-BE49-F238E27FC236}"><a16:creationId id="{04904B7F-841D-43C0-8DB5-6CD765B0AABE}" xmlns:a16="http://schemas.microsoft.com/office/drawing/2014/main" /></a:ext></a:extLst></p:cNvPr><p:cNvSpPr><a:spLocks noGrp="1" xmlns:a="http://schemas.openxmlformats.org/drawingml/2006/main" /></p:cNvSpPr><p:nvPr /></p:nvSpPr><p:spPr><a:xfrm xmlns:a="http://schemas.openxmlformats.org/drawingml/2006/main"><a:off x="514350" y="1190625" /><a:ext cx="2633663" cy="1257300" /></a:xfrm><a:prstGeom prst="roundRect" xmlns:a="http://schemas.openxmlformats.org/drawingml/2006/main"><a:avLst><a:gd name="adj" fmla="val 6061" /></a:avLst></a:prstGeom><a:solidFill xmlns:a="http://schemas.openxmlformats.org/drawingml/2006/main"><a:srgbClr val="F4F6F8" /></a:solidFill><a:ln w="12383" xmlns:a="http://schemas.openxmlformats.org/drawingml/2006/main"><a:solidFill><a:srgbClr val="D7DEE8" /></a:solidFill><a:prstDash val="solid" /></a:ln></p:spPr><p:txBody><a:bodyPr anchor="ctr" xmlns:a="http://schemas.openxmlformats.org/drawingml/2006/main" /><a:lstStyle xmlns:a="http://schemas.openxmlformats.org/drawingml/2006/main" /><a:p xmlns:a="http://schemas.openxmlformats.org/drawingml/2006/main"><a:pPr algn="ctr"><a:defRPr sz="1600" b="1"><a:solidFill><a:srgbClr val="172033" /></a:solidFill></a:defRPr></a:pPr><a:r><a:rPr sz="1600" b="1"><a:solidFill><a:srgbClr val="172033" /></a:solidFill></a:rPr><a:t>S situation</a:t></a:r></a:p><a:p xmlns:a="http://schemas.openxmlformats.org/drawingml/2006/main"><a:pPr algn="ctr"><a:defRPr sz="1600" b="1"><a:solidFill><a:srgbClr val="172033" /></a:solidFill></a:defRPr></a:pPr><a:r><a:rPr sz="1600" b="1"><a:solidFill><a:srgbClr val="172033" /></a:solidFill></a:rPr><a:t>The existing system is scattered and the data caliber is not uniform.</a:t></a:r></a:p></p:txBody></p:sp><p:sp><p:nvSpPr><p:cNvPr id="3" name="scqa-2"><a:extLst xmlns:a="http://schemas.openxmlformats.org/drawingml/2006/main"><a:ext uri="{FF2B5EF4-FFF2-40B4-BE49-F238E27FC236}"><a16:creationId id="{2E39F356-076D-4B93-9978-EEC7A224120F}" xmlns:a16="http://schemas.microsoft.com/office/drawing/2014/main" /></a:ext></a:extLst></p:cNvPr><p:cNvSpPr><a:spLocks noGrp="1" xmlns:a="http://schemas.openxmlformats.org/drawingml/2006/main" /></p:cNvSpPr><p:nvPr /></p:nvSpPr><p:spPr><a:xfrm xmlns:a="http://schemas.openxmlformats.org/drawingml/2006/main"><a:off x="3357563" y="1190625" /><a:ext cx="2633663" cy="1257300" /></a:xfrm><a:prstGeom prst="roundRect" xmlns:a="http://schemas.openxmlformats.org/drawingml/2006/main"><a:avLst><a:gd name="adj" fmla="val 6061" /></a:avLst></a:prstGeom><a:solidFill xmlns:a="http://schemas.openxmlformats.org/drawingml/2006/main"><a:srgbClr val="FFF0E2" /></a:solidFill><a:ln w="12383" xmlns:a="http://schemas.openxmlformats.org/drawingml/2006/main"><a:solidFill><a:srgbClr val="E8872D" /></a:solidFill><a:prstDash val="solid" /></a:ln></p:spPr><p:txBody><a:bodyPr anchor="ctr" xmlns:a="http://schemas.openxmlformats.org/drawingml/2006/main" /><a:lstStyle xmlns:a="http://schemas.openxmlformats.org/drawingml/2006/main" /><a:p xmlns:a="http://schemas.openxmlformats.org/drawingml/2006/main"><a:pPr algn="ctr"><a:defRPr sz="1600" b="1"><a:solidFill><a:srgbClr val="172033" /></a:solidFill></a:defRPr></a:pPr><a:r><a:rPr sz="1600" b="1"><a:solidFill><a:srgbClr val="172033" /></a:solidFill></a:rPr><a:t>C conflict</a:t></a:r></a:p><a:p xmlns:a="http://schemas.openxmlformats.org/drawingml/2006/main"><a:pPr algn="ctr"><a:defRPr sz="1600" b="1"><a:solidFill><a:srgbClr val="172033" /></a:solidFill></a:defRPr></a:pPr><a:r><a:rPr sz="1600" b="1"><a:solidFill><a:srgbClr val="172033" /></a:solidFill></a:rPr><a:t>Business demand is growing rapidly, but delivery capabilities are insufficient</a:t></a:r></a:p></p:txBody></p:sp><p:sp><p:nvSpPr><p:cNvPr id="4" name="scqa-3"><a:extLst xmlns:a="http://schemas.openxmlformats.org/drawingml/2006/main"><a:ext uri="{FF2B5EF4-FFF2-40B4-BE49-F238E27FC236}"><a16:creationId id="{91709CD8-5F60-4B6B-BA04-8BD15B613EDB}" xmlns:a16="http://schemas.microsoft.com/office/drawing/2014/main" /></a:ext></a:extLst></p:cNvPr><p:cNvSpPr><a:spLocks noGrp="1" xmlns:a="http://schemas.openxmlformats.org/drawingml/2006/main" /></p:cNvSpPr><p:nvPr /></p:nvSpPr><p:spPr><a:xfrm xmlns:a="http://schemas.openxmlformats.org/drawingml/2006/main"><a:off x="6200775" y="1190625" /><a:ext cx="2633663" cy="1257300" /></a:xfrm><a:prstGeom prst="roundRect" xmlns:a="http://schemas.openxmlformats.org/drawingml/2006/main"><a:avLst><a:gd name="adj" fmla="val 6061" /></a:avLst></a:prstGeom><a:solidFill xmlns:a="http://schemas.openxmlformats.org/drawingml/2006/main"><a:srgbClr val="F4F6F8" /></a:solidFill><a:ln w="12383" xmlns:a="http://schemas.openxmlformats.org/drawingml/2006/main"><a:solidFill><a:srgbClr val="D7DEE8" /></a:solidFill><a:prstDash val="solid" /></a:ln></p:spPr><p:txBody><a:bodyPr anchor="ctr" xmlns:a="http://schemas.openxmlformats.org/drawingml/2006/main" /><a:lstStyle xmlns:a="http://schemas.openxmlformats.org/drawingml/2006/main" /><a:p xmlns:a="http://schemas.openxmlformats.org/drawingml/2006/main"><a:pPr algn="ctr"><a:defRPr sz="1600" b="1"><a:solidFill><a:srgbClr val="172033" /></a:solidFill></a:defRPr></a:pPr><a:r><a:rPr sz="1600" b="1"><a:solidFill><a:srgbClr val="172033" /></a:solidFill></a:rPr><a:t>Q question</a:t></a:r></a:p><a:p xmlns:a="http://schemas.openxmlformats.org/drawingml/2006/main"><a:pPr algn="ctr"><a:defRPr sz="1600" b="1"><a:solidFill><a:srgbClr val="172033" /></a:solidFill></a:defRPr></a:pPr><a:r><a:rPr sz="1600" b="1"><a:solidFill><a:srgbClr val="172033" /></a:solidFill></a:rPr><a:t>How to transform without disrupting your business</a:t></a:r></a:p></p:txBody></p:sp><p:sp><p:nvSpPr><p:cNvPr id="5" name="scqa-4"><a:extLst xmlns:a="http://schemas.openxmlformats.org/drawingml/2006/main"><a:ext uri="{FF2B5EF4-FFF2-40B4-BE49-F238E27FC236}"><a16:creationId id="{82358893-C0C9-4A16-AE3A-85D0AD052D32}" xmlns:a16="http://schemas.microsoft.com/office/drawing/2014/main" /></a:ext></a:extLst></p:cNvPr><p:cNvSpPr><a:spLocks noGrp="1" xmlns:a="http://schemas.openxmlformats.org/drawingml/2006/main" /></p:cNvSpPr><p:nvPr /></p:nvSpPr><p:spPr><a:xfrm xmlns:a="http://schemas.openxmlformats.org/drawingml/2006/main"><a:off x="9043988" y="1190625" /><a:ext cx="2633663" cy="1257300" /></a:xfrm><a:prstGeom prst="roundRect" xmlns:a="http://schemas.openxmlformats.org/drawingml/2006/main"><a:avLst><a:gd name="adj" fmla="val 6061" /></a:avLst></a:prstGeom><a:solidFill xmlns:a="http://schemas.openxmlformats.org/drawingml/2006/main"><a:srgbClr val="15375F" /></a:solidFill><a:ln w="0" xmlns:a="http://schemas.openxmlformats.org/drawingml/2006/main"><a:solidFill><a:srgbClr val="D7DEE8" /></a:solidFill><a:prstDash val="solid" /></a:ln></p:spPr><p:txBody><a:bodyPr anchor="ctr" xmlns:a="http://schemas.openxmlformats.org/drawingml/2006/main" /><a:lstStyle xmlns:a="http://schemas.openxmlformats.org/drawingml/2006/main" /><a:p xmlns:a="http://schemas.openxmlformats.org/drawingml/2006/main"><a:pPr algn="ctr"><a:defRPr sz="1600" b="1"><a:solidFill><a:srgbClr val="FFFFFF" /></a:solidFill></a:defRPr></a:pPr><a:r><a:rPr sz="1600" b="1"><a:solidFill><a:srgbClr val="FFFFFF" /></a:solidFill></a:rPr><a:t>A answer</a:t></a:r></a:p><a:p xmlns:a="http://schemas.openxmlformats.org/drawingml/2006/main"><a:pPr algn="ctr"><a:defRPr sz="1600" b="1"><a:solidFill><a:srgbClr val="FFFFFF" /></a:solidFill></a:defRPr></a:pPr><a:r><a:rPr sz="1600" b="1"><a:solidFill><a:srgbClr val="FFFFFF" /></a:solidFill></a:rPr><a:t>Adopt a three-stage path of pilot, replication and solidification</a:t></a:r></a:p></p:txBody></p:sp><p:sp><p:nvSpPr><p:cNvPr id="9" name="stage-1-header"><a:extLst xmlns:a="http://schemas.openxmlformats.org/drawingml/2006/main"><a:ext uri="{FF2B5EF4-FFF2-40B4-BE49-F238E27FC236}"><a16:creationId id="{B64162D0-B79C-43E6-A577-9F657AB2A4CB}" xmlns:a16="http://schemas.microsoft.com/office/drawing/2014/main" /></a:ext></a:extLst></p:cNvPr><p:cNvSpPr><a:spLocks noGrp="1" xmlns:a="http://schemas.openxmlformats.org/drawingml/2006/main" /></p:cNvSpPr><p:nvPr /></p:nvSpPr><p:spPr><a:xfrm xmlns:a="http://schemas.openxmlformats.org/drawingml/2006/main"><a:off x="1943100" y="2857500" /><a:ext cx="3244850" cy="514350" /></a:xfrm><a:prstGeom prst="rect" xmlns:a="http://schemas.openxmlformats.org/drawingml/2006/main"><a:avLst /></a:prstGeom><a:solidFill xmlns:a="http://schemas.openxmlformats.org/drawingml/2006/main"><a:srgbClr val="E9F1FA" /></a:solidFill><a:ln w="9525" xmlns:a="http://schemas.openxmlformats.org/drawingml/2006/main"><a:solidFill><a:srgbClr val="D7DEE8" /></a:solidFill><a:prstDash val="solid" /></a:ln></p:spPr><p:txBody><a:bodyPr anchor="ctr" xmlns:a="http://schemas.openxmlformats.org/drawingml/2006/main" /><a:lstStyle xmlns:a="http://schemas.openxmlformats.org/drawingml/2006/main" /><a:p xmlns:a="http://schemas.openxmlformats.org/drawingml/2006/main"><a:pPr algn="ctr"><a:defRPr sz="1600" b="1"><a:solidFill><a:srgbClr val="15375F" /></a:solidFill></a:defRPr></a:pPr><a:r><a:rPr sz="1600" b="1"><a:solidFill><a:srgbClr val="15375F" /></a:solidFill></a:rPr><a:t>0–3 month</a:t></a:r></a:p><a:p xmlns:a="http://schemas.openxmlformats.org/drawingml/2006/main"><a:pPr algn="ctr"><a:defRPr sz="1600" b="1"><a:solidFill><a:srgbClr val="15375F" /></a:solidFill></a:defRPr></a:pPr><a:r><a:rPr sz="1600" b="1"><a:solidFill><a:srgbClr val="15375F" /></a:solidFill></a:rPr><a:t>◆ Pilot acceptance passed</a:t></a:r></a:p></p:txBody></p:sp><p:sp><p:nvSpPr><p:cNvPr id="10" name="lane-label-1"><a:extLst xmlns:a="http://schemas.openxmlformats.org/drawingml/2006/main"><a:ext uri="{FF2B5EF4-FFF2-40B4-BE49-F238E27FC236}"><a16:creationId id="{6BF66F75-6498-4725-862F-E1AD77CCE429}" xmlns:a16="http://schemas.microsoft.com/office/drawing/2014/main" /></a:ext></a:extLst></p:cNvPr><p:cNvSpPr><a:spLocks noGrp="1" xmlns:a="http://schemas.openxmlformats.org/drawingml/2006/main" /></p:cNvSpPr><p:nvPr /></p:nvSpPr><p:spPr><a:xfrm xmlns:a="http://schemas.openxmlformats.org/drawingml/2006/main"><a:off x="514350" y="3371850" /><a:ext cx="1428750" cy="1314450" /></a:xfrm><a:prstGeom prst="rect" xmlns:a="http://schemas.openxmlformats.org/drawingml/2006/main"><a:avLst /></a:prstGeom><a:solidFill xmlns:a="http://schemas.openxmlformats.org/drawingml/2006/main"><a:srgbClr val="F4F6F8" /></a:solidFill><a:ln w="9525" xmlns:a="http://schemas.openxmlformats.org/drawingml/2006/main"><a:solidFill><a:srgbClr val="D7DEE8" /></a:solidFill><a:prstDash val="solid" /></a:ln></p:spPr><p:txBody><a:bodyPr anchor="ctr" xmlns:a="http://schemas.openxmlformats.org/drawingml/2006/main" /><a:lstStyle xmlns:a="http://schemas.openxmlformats.org/drawingml/2006/main" /><a:p xmlns:a="http://schemas.openxmlformats.org/drawingml/2006/main"><a:pPr algn="ctr"><a:defRPr sz="1600" b="1"><a:solidFill><a:srgbClr val="15375F" /></a:solidFill></a:defRPr></a:pPr><a:r><a:rPr sz="1600" b="1"><a:solidFill><a:srgbClr val="15375F" /></a:solidFill></a:rPr><a:t>Organization and Process</a:t></a:r></a:p></p:txBody></p:sp><p:sp><p:nvSpPr><p:cNvPr id="11" name="stage-1-lane-1"><a:extLst xmlns:a="http://schemas.openxmlformats.org/drawingml/2006/main"><a:ext uri="{FF2B5EF4-FFF2-40B4-BE49-F238E27FC236}"><a16:creationId id="{C12C8422-47F5-4E97-A5F5-A0D72E667D67}" xmlns:a16="http://schemas.microsoft.com/office/drawing/2014/main" /></a:ext></a:extLst></p:cNvPr><p:cNvSpPr><a:spLocks noGrp="1" xmlns:a="http://schemas.openxmlformats.org/drawingml/2006/main" /></p:cNvSpPr><p:nvPr /></p:nvSpPr><p:spPr><a:xfrm xmlns:a="http://schemas.openxmlformats.org/drawingml/2006/main"><a:off x="1943100" y="3371850" /><a:ext cx="3244850" cy="1314450" /></a:xfrm><a:prstGeom prst="rect" xmlns:a="http://schemas.openxmlformats.org/drawingml/2006/main"><a:avLst /></a:prstGeom><a:solidFill xmlns:a="http://schemas.openxmlformats.org/drawingml/2006/main"><a:srgbClr val="FFFFFF" /></a:solidFill><a:ln w="9525" xmlns:a="http://schemas.openxmlformats.org/drawingml/2006/main"><a:solidFill><a:srgbClr val="D7DEE8" /></a:solidFill><a:prstDash val="solid" /></a:ln></p:spPr><p:txBody><a:bodyPr anchor="ctr" xmlns:a="http://schemas.openxmlformats.org/drawingml/2006/main" /><a:lstStyle xmlns:a="http://schemas.openxmlformats.org/drawingml/2006/main" /><a:p xmlns:a="http://schemas.openxmlformats.org/drawingml/2006/main"><a:pPr algn="ctr"><a:defRPr sz="1600" b="0"><a:solidFill><a:srgbClr val="172033" /></a:solidFill></a:defRPr></a:pPr><a:r><a:rPr sz="1600" b="0"><a:solidFill><a:srgbClr val="172033" /></a:solidFill></a:rPr><a:t>Complete process sorting</a:t></a:r></a:p></p:txBody></p:sp><p:sp><p:nvSpPr><p:cNvPr id="12" name="lane-label-2"><a:extLst xmlns:a="http://schemas.openxmlformats.org/drawingml/2006/main"><a:ext uri="{FF2B5EF4-FFF2-40B4-BE49-F238E27FC236}"><a16:creationId id="{50FEA97C-74C1-49CB-883E-B8C64F54D4C6}" xmlns:a16="http://schemas.microsoft.com/office/drawing/2014/main" /></a:ext></a:extLst></p:cNvPr><p:cNvSpPr><a:spLocks noGrp="1" xmlns:a="http://schemas.openxmlformats.org/drawingml/2006/main" /></p:cNvSpPr><p:nvPr /></p:nvSpPr><p:spPr><a:xfrm xmlns:a="http://schemas.openxmlformats.org/drawingml/2006/main"><a:off x="514350" y="4686300" /><a:ext cx="1428750" cy="1314450" /></a:xfrm><a:prstGeom prst="rect" xmlns:a="http://schemas.openxmlformats.org/drawingml/2006/main"><a:avLst /></a:prstGeom><a:solidFill xmlns:a="http://schemas.openxmlformats.org/drawingml/2006/main"><a:srgbClr val="F4F6F8" /></a:solidFill><a:ln w="9525" xmlns:a="http://schemas.openxmlformats.org/drawingml/2006/main"><a:solidFill><a:srgbClr val="D7DEE8" /></a:solidFill><a:prstDash val="solid" /></a:ln></p:spPr><p:txBody><a:bodyPr anchor="ctr" xmlns:a="http://schemas.openxmlformats.org/drawingml/2006/main" /><a:lstStyle xmlns:a="http://schemas.openxmlformats.org/drawingml/2006/main" /><a:p xmlns:a="http://schemas.openxmlformats.org/drawingml/2006/main"><a:pPr algn="ctr"><a:defRPr sz="1600" b="1"><a:solidFill><a:srgbClr val="15375F" /></a:solidFill></a:defRPr></a:pPr><a:r><a:rPr sz="1600" b="1"><a:solidFill><a:srgbClr val="15375F" /></a:solidFill></a:rPr><a:t>Technology & Tools</a:t></a:r></a:p></p:txBody></p:sp><p:sp><p:nvSpPr><p:cNvPr id="13" name="stage-1-lane-2"><a:extLst xmlns:a="http://schemas.openxmlformats.org/drawingml/2006/main"><a:ext uri="{FF2B5EF4-FFF2-40B4-BE49-F238E27FC236}"><a16:creationId id="{63EADA2C-408C-452E-A961-14E099B4B99D}" xmlns:a16="http://schemas.microsoft.com/office/drawing/2014/main" /></a:ext></a:extLst></p:cNvPr><p:cNvSpPr><a:spLocks noGrp="1" xmlns:a="http://schemas.openxmlformats.org/drawingml/2006/main" /></p:cNvSpPr><p:nvPr /></p:nvSpPr><p:spPr><a:xfrm xmlns:a="http://schemas.openxmlformats.org/drawingml/2006/main"><a:off x="1943100" y="4686300" /><a:ext cx="3244850" cy="1314450" /></a:xfrm><a:prstGeom prst="rect" xmlns:a="http://schemas.openxmlformats.org/drawingml/2006/main"><a:avLst /></a:prstGeom><a:solidFill xmlns:a="http://schemas.openxmlformats.org/drawingml/2006/main"><a:srgbClr val="FFFFFF" /></a:solidFill><a:ln w="9525" xmlns:a="http://schemas.openxmlformats.org/drawingml/2006/main"><a:solidFill><a:srgbClr val="D7DEE8" /></a:solidFill><a:prstDash val="solid" /></a:ln></p:spPr><p:txBody><a:bodyPr anchor="ctr" xmlns:a="http://schemas.openxmlformats.org/drawingml/2006/main" /><a:lstStyle xmlns:a="http://schemas.openxmlformats.org/drawingml/2006/main" /><a:p xmlns:a="http://schemas.openxmlformats.org/drawingml/2006/main"><a:pPr algn="ctr"><a:defRPr sz="1600" b="0"><a:solidFill><a:srgbClr val="172033" /></a:solidFill></a:defRPr></a:pPr><a:r><a:rPr sz="1600" b="0"><a:solidFill><a:srgbClr val="172033" /></a:solidFill></a:rPr><a:t>Launch the minimum available version</a:t></a:r></a:p></p:txBody></p:sp><p:sp><p:nvSpPr><p:cNvPr id="14" name="stage-2-header"><a:extLst xmlns:a="http://schemas.openxmlformats.org/drawingml/2006/main"><a:ext uri="{FF2B5EF4-FFF2-40B4-BE49-F238E27FC236}"><a16:creationId id="{F1B090B4-24BE-45D6-8738-7AC0F8EF6C07}" xmlns:a16="http://schemas.microsoft.com/office/drawing/2014/main" /></a:ext></a:extLst></p:cNvPr><p:cNvSpPr><a:spLocks noGrp="1" xmlns:a="http://schemas.openxmlformats.org/drawingml/2006/main" /></p:cNvSpPr><p:nvPr /></p:nvSpPr><p:spPr><a:xfrm xmlns:a="http://schemas.openxmlformats.org/drawingml/2006/main"><a:off x="5187950" y="2857500" /><a:ext cx="3244850" cy="514350" /></a:xfrm><a:prstGeom prst="rect" xmlns:a="http://schemas.openxmlformats.org/drawingml/2006/main"><a:avLst /></a:prstGeom><a:solidFill xmlns:a="http://schemas.openxmlformats.org/drawingml/2006/main"><a:srgbClr val="F4F6F8" /></a:solidFill><a:ln w="9525" xmlns:a="http://schemas.openxmlformats.org/drawingml/2006/main"><a:solidFill><a:srgbClr val="D7DEE8" /></a:solidFill><a:prstDash val="solid" /></a:ln></p:spPr><p:txBody><a:bodyPr anchor="ctr" xmlns:a="http://schemas.openxmlformats.org/drawingml/2006/main" /><a:lstStyle xmlns:a="http://schemas.openxmlformats.org/drawingml/2006/main" /><a:p xmlns:a="http://schemas.openxmlformats.org/drawingml/2006/main"><a:pPr algn="ctr"><a:defRPr sz="1600" b="1"><a:solidFill><a:srgbClr val="15375F" /></a:solidFill></a:defRPr></a:pPr><a:r><a:rPr sz="1600" b="1"><a:solidFill><a:srgbClr val="15375F" /></a:solidFill></a:rPr><a:t>4–8 month</a:t></a:r></a:p><a:p xmlns:a="http://schemas.openxmlformats.org/drawingml/2006/main"><a:pPr algn="ctr"><a:defRPr sz="1600" b="1"><a:solidFill><a:srgbClr val="15375F" /></a:solidFill></a:defRPr></a:pPr><a:r><a:rPr sz="1600" b="1"><a:solidFill><a:srgbClr val="15375F" /></a:solidFill></a:rPr><a:t>◆ Coverage reaches 60%</a:t></a:r></a:p></p:txBody></p:sp><p:sp><p:nvSpPr><p:cNvPr id="15" name="stage-2-lane-1"><a:extLst xmlns:a="http://schemas.openxmlformats.org/drawingml/2006/main"><a:ext uri="{FF2B5EF4-FFF2-40B4-BE49-F238E27FC236}"><a16:creationId id="{A4875AC3-7BCF-4809-9287-852DC6C4F674}" xmlns:a16="http://schemas.microsoft.com/office/drawing/2014/main" /></a:ext></a:extLst></p:cNvPr><p:cNvSpPr><a:spLocks noGrp="1" xmlns:a="http://schemas.openxmlformats.org/drawingml/2006/main" /></p:cNvSpPr><p:nvPr /></p:nvSpPr><p:spPr><a:xfrm xmlns:a="http://schemas.openxmlformats.org/drawingml/2006/main"><a:off x="5187950" y="3371850" /><a:ext cx="3244850" cy="1314450" /></a:xfrm><a:prstGeom prst="rect" xmlns:a="http://schemas.openxmlformats.org/drawingml/2006/main"><a:avLst /></a:prstGeom><a:solidFill xmlns:a="http://schemas.openxmlformats.org/drawingml/2006/main"><a:srgbClr val="FFFFFF" /></a:solidFill><a:ln w="9525" xmlns:a="http://schemas.openxmlformats.org/drawingml/2006/main"><a:solidFill><a:srgbClr val="D7DEE8" /></a:solidFill><a:prstDash val="solid" /></a:ln></p:spPr><p:txBody><a:bodyPr anchor="ctr" xmlns:a="http://schemas.openxmlformats.org/drawingml/2006/main" /><a:lstStyle xmlns:a="http://schemas.openxmlformats.org/drawingml/2006/main" /><a:p xmlns:a="http://schemas.openxmlformats.org/drawingml/2006/main"><a:pPr algn="ctr"><a:defRPr sz="1600" b="0"><a:solidFill><a:srgbClr val="172033" /></a:solidFill></a:defRPr></a:pPr><a:r><a:rPr sz="1600" b="0"><a:solidFill><a:srgbClr val="172033" /></a:solidFill></a:rPr><a:t>Copy standard process</a:t></a:r></a:p></p:txBody></p:sp><p:sp><p:nvSpPr><p:cNvPr id="16" name="stage-2-lane-2"><a:extLst xmlns:a="http://schemas.openxmlformats.org/drawingml/2006/main"><a:ext uri="{FF2B5EF4-FFF2-40B4-BE49-F238E27FC236}"><a16:creationId id="{EE0BB40D-380D-4B7B-8F33-EBB46AF8F348}" xmlns:a16="http://schemas.microsoft.com/office/drawing/2014/main" /></a:ext></a:extLst></p:cNvPr><p:cNvSpPr><a:spLocks noGrp="1" xmlns:a="http://schemas.openxmlformats.org/drawingml/2006/main" /></p:cNvSpPr><p:nvPr /></p:nvSpPr><p:spPr><a:xfrm xmlns:a="http://schemas.openxmlformats.org/drawingml/2006/main"><a:off x="5187950" y="4686300" /><a:ext cx="3244850" cy="1314450" /></a:xfrm><a:prstGeom prst="rect" xmlns:a="http://schemas.openxmlformats.org/drawingml/2006/main"><a:avLst /></a:prstGeom><a:solidFill xmlns:a="http://schemas.openxmlformats.org/drawingml/2006/main"><a:srgbClr val="FFFFFF" /></a:solidFill><a:ln w="9525" xmlns:a="http://schemas.openxmlformats.org/drawingml/2006/main"><a:solidFill><a:srgbClr val="D7DEE8" /></a:solidFill><a:prstDash val="solid" /></a:ln></p:spPr><p:txBody><a:bodyPr anchor="ctr" xmlns:a="http://schemas.openxmlformats.org/drawingml/2006/main" /><a:lstStyle xmlns:a="http://schemas.openxmlformats.org/drawingml/2006/main" /><a:p xmlns:a="http://schemas.openxmlformats.org/drawingml/2006/main"><a:pPr algn="ctr"><a:defRPr sz="1600" b="0"><a:solidFill><a:srgbClr val="172033" /></a:solidFill></a:defRPr></a:pPr><a:r><a:rPr sz="1600" b="0"><a:solidFill><a:srgbClr val="172033" /></a:solidFill></a:rPr><a:t>Extend core interface</a:t></a:r></a:p></p:txBody></p:sp><p:sp><p:nvSpPr><p:cNvPr id="17" name="stage-3-header"><a:extLst xmlns:a="http://schemas.openxmlformats.org/drawingml/2006/main"><a:ext uri="{FF2B5EF4-FFF2-40B4-BE49-F238E27FC236}"><a16:creationId id="{B666F043-C9D9-4AAE-8460-56A356A6A826}" xmlns:a16="http://schemas.microsoft.com/office/drawing/2014/main" /></a:ext></a:extLst></p:cNvPr><p:cNvSpPr><a:spLocks noGrp="1" xmlns:a="http://schemas.openxmlformats.org/drawingml/2006/main" /></p:cNvSpPr><p:nvPr /></p:nvSpPr><p:spPr><a:xfrm xmlns:a="http://schemas.openxmlformats.org/drawingml/2006/main"><a:off x="8432800" y="2857500" /><a:ext cx="3244850" cy="514350" /></a:xfrm><a:prstGeom prst="rect" xmlns:a="http://schemas.openxmlformats.org/drawingml/2006/main"><a:avLst /></a:prstGeom><a:solidFill xmlns:a="http://schemas.openxmlformats.org/drawingml/2006/main"><a:srgbClr val="E9F1FA" /></a:solidFill><a:ln w="9525" xmlns:a="http://schemas.openxmlformats.org/drawingml/2006/main"><a:solidFill><a:srgbClr val="D7DEE8" /></a:solidFill><a:prstDash val="solid" /></a:ln></p:spPr><p:txBody><a:bodyPr anchor="ctr" xmlns:a="http://schemas.openxmlformats.org/drawingml/2006/main" /><a:lstStyle xmlns:a="http://schemas.openxmlformats.org/drawingml/2006/main" /><a:p xmlns:a="http://schemas.openxmlformats.org/drawingml/2006/main"><a:pPr algn="ctr"><a:defRPr sz="1600" b="1"><a:solidFill><a:srgbClr val="15375F" /></a:solidFill></a:defRPr></a:pPr><a:r><a:rPr sz="1600" b="1"><a:solidFill><a:srgbClr val="15375F" /></a:solidFill></a:rPr><a:t>9–12 month</a:t></a:r></a:p><a:p xmlns:a="http://schemas.openxmlformats.org/drawingml/2006/main"><a:pPr algn="ctr"><a:defRPr sz="1600" b="1"><a:solidFill><a:srgbClr val="15375F" /></a:solidFill></a:defRPr></a:pPr><a:r><a:rPr sz="1600" b="1"><a:solidFill><a:srgbClr val="15375F" /></a:solidFill></a:rPr><a:t>◆ Operational indicators meet standards</a:t></a:r></a:p></p:txBody></p:sp><p:sp><p:nvSpPr><p:cNvPr id="18" name="stage-3-lane-1"><a:extLst xmlns:a="http://schemas.openxmlformats.org/drawingml/2006/main"><a:ext uri="{FF2B5EF4-FFF2-40B4-BE49-F238E27FC236}"><a16:creationId id="{0DC3B75C-EC5F-4155-95FD-827C8C665D61}" xmlns:a16="http://schemas.microsoft.com/office/drawing/2014/main" /></a:ext></a:extLst></p:cNvPr><p:cNvSpPr><a:spLocks noGrp="1" xmlns:a="http://schemas.openxmlformats.org/drawingml/2006/main" /></p:cNvSpPr><p:nvPr /></p:nvSpPr><p:spPr><a:xfrm xmlns:a="http://schemas.openxmlformats.org/drawingml/2006/main"><a:off x="8432800" y="3371850" /><a:ext cx="3244850" cy="1314450" /></a:xfrm><a:prstGeom prst="rect" xmlns:a="http://schemas.openxmlformats.org/drawingml/2006/main"><a:avLst /></a:prstGeom><a:solidFill xmlns:a="http://schemas.openxmlformats.org/drawingml/2006/main"><a:srgbClr val="FFFFFF" /></a:solidFill><a:ln w="9525" xmlns:a="http://schemas.openxmlformats.org/drawingml/2006/main"><a:solidFill><a:srgbClr val="D7DEE8" /></a:solidFill><a:prstDash val="solid" /></a:ln></p:spPr><p:txBody><a:bodyPr anchor="ctr" xmlns:a="http://schemas.openxmlformats.org/drawingml/2006/main" /><a:lstStyle xmlns:a="http://schemas.openxmlformats.org/drawingml/2006/main" /><a:p xmlns:a="http://schemas.openxmlformats.org/drawingml/2006/main"><a:pPr algn="ctr"><a:defRPr sz="1600" b="0"><a:solidFill><a:srgbClr val="172033" /></a:solidFill></a:defRPr></a:pPr><a:r><a:rPr sz="1600" b="0"><a:solidFill><a:srgbClr val="172033" /></a:solidFill></a:rPr><a:t>Solid governance mechanism</a:t></a:r></a:p></p:txBody></p:sp><p:sp><p:nvSpPr><p:cNvPr id="19" name="stage-3-lane-2"><a:extLst xmlns:a="http://schemas.openxmlformats.org/drawingml/2006/main"><a:ext uri="{FF2B5EF4-FFF2-40B4-BE49-F238E27FC236}"><a16:creationId id="{90C9E604-E446-48B2-865F-771C70B8DFE9}" xmlns:a16="http://schemas.microsoft.com/office/drawing/2014/main" /></a:ext></a:extLst></p:cNvPr><p:cNvSpPr><a:spLocks noGrp="1" xmlns:a="http://schemas.openxmlformats.org/drawingml/2006/main" /></p:cNvSpPr><p:nvPr /></p:nvSpPr><p:spPr><a:xfrm xmlns:a="http://schemas.openxmlformats.org/drawingml/2006/main"><a:off x="8432800" y="4686300" /><a:ext cx="3244850" cy="1314450" /></a:xfrm><a:prstGeom prst="rect" xmlns:a="http://schemas.openxmlformats.org/drawingml/2006/main"><a:avLst /></a:prstGeom><a:solidFill xmlns:a="http://schemas.openxmlformats.org/drawingml/2006/main"><a:srgbClr val="FFFFFF" /></a:solidFill><a:ln w="9525" xmlns:a="http://schemas.openxmlformats.org/drawingml/2006/main"><a:solidFill><a:srgbClr val="D7DEE8" /></a:solidFill><a:prstDash val="solid" /></a:ln></p:spPr><p:txBody><a:bodyPr anchor="ctr" xmlns:a="http://schemas.openxmlformats.org/drawingml/2006/main" /><a:lstStyle xmlns:a="http://schemas.openxmlformats.org/drawingml/2006/main" /><a:p xmlns:a="http://schemas.openxmlformats.org/drawingml/2006/main"><a:pPr algn="ctr"><a:defRPr sz="1600" b="0"><a:solidFill><a:srgbClr val="172033" /></a:solidFill></a:defRPr></a:pPr><a:r><a:rPr sz="1600" b="0"><a:solidFill><a:srgbClr val="172033" /></a:solidFill></a:rPr><a:t>Establish ongoing operations</a:t></a:r></a:p></p:txBody></p:sp></p:spTree><p:extLst><p:ext uri="{BB962C8B-B14F-4D97-AF65-F5344CB8AC3E}"><p14:creationId val="3182791" xmlns:p14="http://schemas.microsoft.com/office/powerpoint/2010/main" /></p:ext></p:extLst></p:cSld></p:sld>
 </file>
 
 <file path=ppt/theme/theme1.xml><?xml version="1.0" encoding="utf-8"?>
